--- a/companies/meridian-actuarial/Engagements/Miller, Cook and Snyder/2017.10.16 - Briefing Deck - Miller, Cook and Snyder.pptx
+++ b/companies/meridian-actuarial/Engagements/Miller, Cook and Snyder/2017.10.16 - Briefing Deck - Miller, Cook and Snyder.pptx
@@ -3114,7 +3114,7 @@
                   <a:srgbClr val="4A2E2A"/>
                 </a:solidFill>
               </a:rPr>
-              <a:t>Reserve Adequacy Review: Progress Briefing</a:t>
+              <a:t>Reserve Adequacy Review: A Briefing on the Work Under Way</a:t>
             </a:r>
           </a:p>
         </p:txBody>
@@ -3139,33 +3139,9 @@
             </a:r>
           </a:p>
           <a:p>
-            <a:pPr lvl="1"/>
-            <a:r>
-              <a:t>Prepared for Miller, Cook and Snyder</a:t>
-            </a:r>
-          </a:p>
-          <a:p>
-            <a:pPr lvl="1"/>
-            <a:r>
-              <a:t>Client contact: Michelle Hudson, Director of Operations</a:t>
-            </a:r>
-          </a:p>
-          <a:p>
-            <a:pPr lvl="1"/>
-            <a:r>
-              <a:t>Engagement commenced August 28, 2017</a:t>
-            </a:r>
-          </a:p>
-          <a:p>
-            <a:pPr lvl="1"/>
-            <a:r>
-              <a:t>Prepared by Megan Dudley, Actuarial Associate, Meridian Actuarial Advisors LLC</a:t>
-            </a:r>
-          </a:p>
-          <a:p>
-            <a:pPr lvl="1"/>
-            <a:r>
-              <a:t>Status: early phase. Data received, reconciliation under way.</a:t>
+            <a:pPr/>
+            <a:r>
+              <a:t>Prepared for Miller, Cook and Snyder by Meridian Actuarial Advisors. The engagement opened on August 28, 2017, and this short briefing sets out what we are doing, who is doing it, and where the work stands now that it is under way.</a:t>
             </a:r>
           </a:p>
         </p:txBody>
@@ -3209,7 +3185,7 @@
                   <a:srgbClr val="4A2E2A"/>
                 </a:solidFill>
               </a:rPr>
-              <a:t>Scope and Standards</a:t>
+              <a:t>The Question We Are Here to Answer</a:t>
             </a:r>
           </a:p>
         </p:txBody>
@@ -3231,25 +3207,19 @@
           <a:p>
             <a:pPr lvl="1"/>
             <a:r>
-              <a:t>An opinion on whether carried reserves make adequate provision for the liabilities they cover.</a:t>
+              <a:t>Whether the reserves Miller, Cook and Snyder carries are adequate to meet the obligations they are meant to fund.</a:t>
             </a:r>
           </a:p>
           <a:p>
             <a:pPr lvl="1"/>
             <a:r>
-              <a:t>Performed under the applicable Actuarial Standards of Practice, including ASOP No. 23 on data quality.</a:t>
+              <a:t>An independent view, formed from your own data as reconciled, not carried in from another engagement.</a:t>
             </a:r>
           </a:p>
           <a:p>
             <a:pPr lvl="1"/>
             <a:r>
-              <a:t>Not an audit. The underlying records are not verified; reliance is disclosed in the report.</a:t>
-            </a:r>
-          </a:p>
-          <a:p>
-            <a:pPr lvl="1"/>
-            <a:r>
-              <a:t>Robert Lawrence is the responsible actuary and signs the opinion.</a:t>
+              <a:t>A written opinion that keeps what the data show, what we assume, and what we conclude as three separate matters.</a:t>
             </a:r>
           </a:p>
         </p:txBody>
@@ -3293,7 +3263,7 @@
                   <a:srgbClr val="4A2E2A"/>
                 </a:solidFill>
               </a:rPr>
-              <a:t>Data Received</a:t>
+              <a:t>What the Review Covers</a:t>
             </a:r>
           </a:p>
         </p:txBody>
@@ -3315,31 +3285,25 @@
           <a:p>
             <a:pPr lvl="1"/>
             <a:r>
-              <a:t>In-force extract and reserve detail by plan received and loaded.</a:t>
+              <a:t>Reconciling the reserve data you provide against your own financial records, so the figures we test are the figures you carry.</a:t>
             </a:r>
           </a:p>
           <a:p>
             <a:pPr lvl="1"/>
             <a:r>
-              <a:t>David Sherman is reconciling counts and totals against the prior valuation.</a:t>
+              <a:t>Reviewing the assumptions behind the current reserves, keeping those that regulation fixes apart from those that rest on judgment.</a:t>
             </a:r>
           </a:p>
           <a:p>
             <a:pPr lvl="1"/>
             <a:r>
-              <a:t>Most record classes reconcile within an explained difference. One does not, and is being looked at.</a:t>
+              <a:t>Building an independent estimate of the required reserves and comparing it against the carried figures, with any difference attributed to its sources.</a:t>
             </a:r>
           </a:p>
           <a:p>
             <a:pPr lvl="1"/>
             <a:r>
-              <a:t>The prior reconciliation summary is outstanding. Not blocking today.</a:t>
-            </a:r>
-          </a:p>
-          <a:p>
-            <a:pPr lvl="1"/>
-            <a:r>
-              <a:t>Data are tested for internal consistency and against the prior period. They are not audited.</a:t>
+              <a:t>Outside the work: auditing your statements, setting your reserves for you, or opining on your rates.</a:t>
             </a:r>
           </a:p>
         </p:txBody>
@@ -3383,7 +3347,7 @@
                   <a:srgbClr val="4A2E2A"/>
                 </a:solidFill>
               </a:rPr>
-              <a:t>Assumption Review</a:t>
+              <a:t>The People on Both Sides</a:t>
             </a:r>
           </a:p>
         </p:txBody>
@@ -3405,31 +3369,25 @@
           <a:p>
             <a:pPr lvl="1"/>
             <a:r>
-              <a:t>Jennifer Vasquez has inventoried the assumptions in force and flagged those changed since the prior valuation.</a:t>
+              <a:t>Jennifer Vasquez, Consulting Actuary, owns the relationship and the judgment calls on scope.</a:t>
             </a:r>
           </a:p>
           <a:p>
             <a:pPr lvl="1"/>
             <a:r>
-              <a:t>Documented basis located for most. The lapse assumption's basis is still being traced.</a:t>
+              <a:t>David Sherman, Senior Analyst, builds the valuation workbook and reconciles the data as it arrives.</a:t>
             </a:r>
           </a:p>
           <a:p>
             <a:pPr lvl="1"/>
             <a:r>
-              <a:t>No recommendation on any assumption at this stage. This is measurement, not judgment.</a:t>
+              <a:t>Megan Dudley, Actuarial Associate, keeps the exhibits, the data checks, and the running request log.</a:t>
             </a:r>
           </a:p>
           <a:p>
             <a:pPr lvl="1"/>
             <a:r>
-              <a:t>Anything said today about direction is preliminary and is not a conclusion.</a:t>
-            </a:r>
-          </a:p>
-          <a:p>
-            <a:pPr lvl="1"/>
-            <a:r>
-              <a:t>The inventory itself will be delivered as a memorandum with the basis on file recorded for each assumption.</a:t>
+              <a:t>Michelle Hudson, your Director of Operations, is our single point of contact for the data.</a:t>
             </a:r>
           </a:p>
         </p:txBody>
@@ -3473,7 +3431,7 @@
                   <a:srgbClr val="4A2E2A"/>
                 </a:solidFill>
               </a:rPr>
-              <a:t>Exhibit Workbook</a:t>
+              <a:t>Where the Work Stands Today</a:t>
             </a:r>
           </a:p>
         </p:txBody>
@@ -3493,9 +3451,27 @@
           <a:bodyPr/>
           <a:lstStyle/>
           <a:p>
-            <a:pPr/>
-            <a:r>
-              <a:t>The workbook follows the prior review's layout so exhibits sit side by side with their predecessors. Every exhibit traces to a named input tab, and the inputs are the extracts as received rather than a cleaned copy. Where a record is excluded, the exclusion is on the face of the exhibit, not in a footnote. The shell is built and the reconciled tabs are populated. Calculated exhibits follow once the open data question is closed.</a:t>
+            <a:pPr lvl="1"/>
+            <a:r>
+              <a:t>We are in the early weeks, and the emphasis now is squarely on the data rather than on conclusions.</a:t>
+            </a:r>
+          </a:p>
+          <a:p>
+            <a:pPr lvl="1"/>
+            <a:r>
+              <a:t>The reserve detail has begun to arrive and the reconciliation against your year-end records is under way.</a:t>
+            </a:r>
+          </a:p>
+          <a:p>
+            <a:pPr lvl="1"/>
+            <a:r>
+              <a:t>One grouping question on the summary totals is open and being run to ground; we expect it to close without consequence.</a:t>
+            </a:r>
+          </a:p>
+          <a:p>
+            <a:pPr lvl="1"/>
+            <a:r>
+              <a:t>We are not offering findings yet, because an opinion this early would run ahead of what the work supports.</a:t>
             </a:r>
           </a:p>
         </p:txBody>
@@ -3539,7 +3515,7 @@
                   <a:srgbClr val="4A2E2A"/>
                 </a:solidFill>
               </a:rPr>
-              <a:t>Next Steps</a:t>
+              <a:t>What Comes Next</a:t>
             </a:r>
           </a:p>
         </p:txBody>
@@ -3559,33 +3535,9 @@
           <a:bodyPr/>
           <a:lstStyle/>
           <a:p>
-            <a:pPr lvl="1"/>
-            <a:r>
-              <a:t>Close out the reconciliation difference and the lapse assumption basis with your staff.</a:t>
-            </a:r>
-          </a:p>
-          <a:p>
-            <a:pPr lvl="1"/>
-            <a:r>
-              <a:t>Complete the calculated exhibits and put them through internal review.</a:t>
-            </a:r>
-          </a:p>
-          <a:p>
-            <a:pPr lvl="1"/>
-            <a:r>
-              <a:t>Working session with Michelle Hudson and her team near the midpoint to walk preliminary results.</a:t>
-            </a:r>
-          </a:p>
-          <a:p>
-            <a:pPr lvl="1"/>
-            <a:r>
-              <a:t>Draft report after that session. Robert Lawrence reviews before anything is circulated.</a:t>
-            </a:r>
-          </a:p>
-          <a:p>
-            <a:pPr lvl="1"/>
-            <a:r>
-              <a:t>Your day-to-day contact for data requests and scheduling remains Megan Dudley.</a:t>
+            <a:pPr/>
+            <a:r>
+              <a:t>From here we finish the reconciliation, then move into the assumption review and the independent estimate, and we will send a short status note as each piece lands so you always know where things stand. The single most useful thing from your side is the assumption documentation as it stood at the valuation date; our one clear next step is to get that itemized request to you this week and confirm each item as it comes back.</a:t>
             </a:r>
           </a:p>
         </p:txBody>
